--- a/Supply Chain Issue Compliance Report.pptx
+++ b/Supply Chain Issue Compliance Report.pptx
@@ -110,7 +110,116 @@
       </a:defRPr>
     </a:lvl9pPr>
   </p:defaultTextStyle>
+  <p:extLst>
+    <p:ext uri="{EFAFB233-063F-42B5-8137-9DF3F51BA10A}">
+      <p15:sldGuideLst xmlns:p15="http://schemas.microsoft.com/office/powerpoint/2012/main"/>
+    </p:ext>
+  </p:extLst>
 </p:presentation>
+</file>
+
+<file path=ppt/changesInfos/changesInfo1.xml><?xml version="1.0" encoding="utf-8"?>
+<pc:chgInfo xmlns:a="http://schemas.openxmlformats.org/drawingml/2006/main" xmlns:r="http://schemas.openxmlformats.org/officeDocument/2006/relationships" xmlns:ac="http://schemas.microsoft.com/office/drawing/2013/main/command" xmlns:pc="http://schemas.microsoft.com/office/powerpoint/2013/main/command">
+  <pc:docChgLst>
+    <pc:chgData name="Abouganba, Aisha [JJCUS]" userId="0ca5406f-c75f-4f28-998c-faee16679346" providerId="ADAL" clId="{3CC03F55-128A-4B67-AD7C-5FFDDFC0538E}"/>
+    <pc:docChg chg="custSel modSld">
+      <pc:chgData name="Abouganba, Aisha [JJCUS]" userId="0ca5406f-c75f-4f28-998c-faee16679346" providerId="ADAL" clId="{3CC03F55-128A-4B67-AD7C-5FFDDFC0538E}" dt="2026-07-08T15:25:00.672" v="0" actId="26606"/>
+      <pc:docMkLst>
+        <pc:docMk/>
+      </pc:docMkLst>
+      <pc:sldChg chg="modSp mod">
+        <pc:chgData name="Abouganba, Aisha [JJCUS]" userId="0ca5406f-c75f-4f28-998c-faee16679346" providerId="ADAL" clId="{3CC03F55-128A-4B67-AD7C-5FFDDFC0538E}" dt="2026-07-08T15:25:00.672" v="0" actId="26606"/>
+        <pc:sldMkLst>
+          <pc:docMk/>
+          <pc:sldMk cId="0" sldId="257"/>
+        </pc:sldMkLst>
+        <pc:spChg chg="mod">
+          <ac:chgData name="Abouganba, Aisha [JJCUS]" userId="0ca5406f-c75f-4f28-998c-faee16679346" providerId="ADAL" clId="{3CC03F55-128A-4B67-AD7C-5FFDDFC0538E}" dt="2026-07-08T15:25:00.672" v="0" actId="26606"/>
+          <ac:spMkLst>
+            <pc:docMk/>
+            <pc:sldMk cId="0" sldId="257"/>
+            <ac:spMk id="5" creationId="{00000000-0000-0000-0000-000000000000}"/>
+          </ac:spMkLst>
+        </pc:spChg>
+      </pc:sldChg>
+      <pc:sldChg chg="modSp mod">
+        <pc:chgData name="Abouganba, Aisha [JJCUS]" userId="0ca5406f-c75f-4f28-998c-faee16679346" providerId="ADAL" clId="{3CC03F55-128A-4B67-AD7C-5FFDDFC0538E}" dt="2026-07-08T15:25:00.672" v="0" actId="26606"/>
+        <pc:sldMkLst>
+          <pc:docMk/>
+          <pc:sldMk cId="0" sldId="258"/>
+        </pc:sldMkLst>
+        <pc:spChg chg="mod">
+          <ac:chgData name="Abouganba, Aisha [JJCUS]" userId="0ca5406f-c75f-4f28-998c-faee16679346" providerId="ADAL" clId="{3CC03F55-128A-4B67-AD7C-5FFDDFC0538E}" dt="2026-07-08T15:25:00.672" v="0" actId="26606"/>
+          <ac:spMkLst>
+            <pc:docMk/>
+            <pc:sldMk cId="0" sldId="258"/>
+            <ac:spMk id="5" creationId="{00000000-0000-0000-0000-000000000000}"/>
+          </ac:spMkLst>
+        </pc:spChg>
+      </pc:sldChg>
+      <pc:sldChg chg="modSp mod">
+        <pc:chgData name="Abouganba, Aisha [JJCUS]" userId="0ca5406f-c75f-4f28-998c-faee16679346" providerId="ADAL" clId="{3CC03F55-128A-4B67-AD7C-5FFDDFC0538E}" dt="2026-07-08T15:25:00.672" v="0" actId="26606"/>
+        <pc:sldMkLst>
+          <pc:docMk/>
+          <pc:sldMk cId="0" sldId="259"/>
+        </pc:sldMkLst>
+        <pc:spChg chg="mod">
+          <ac:chgData name="Abouganba, Aisha [JJCUS]" userId="0ca5406f-c75f-4f28-998c-faee16679346" providerId="ADAL" clId="{3CC03F55-128A-4B67-AD7C-5FFDDFC0538E}" dt="2026-07-08T15:25:00.672" v="0" actId="26606"/>
+          <ac:spMkLst>
+            <pc:docMk/>
+            <pc:sldMk cId="0" sldId="259"/>
+            <ac:spMk id="5" creationId="{00000000-0000-0000-0000-000000000000}"/>
+          </ac:spMkLst>
+        </pc:spChg>
+      </pc:sldChg>
+      <pc:sldChg chg="modSp mod">
+        <pc:chgData name="Abouganba, Aisha [JJCUS]" userId="0ca5406f-c75f-4f28-998c-faee16679346" providerId="ADAL" clId="{3CC03F55-128A-4B67-AD7C-5FFDDFC0538E}" dt="2026-07-08T15:25:00.672" v="0" actId="26606"/>
+        <pc:sldMkLst>
+          <pc:docMk/>
+          <pc:sldMk cId="0" sldId="260"/>
+        </pc:sldMkLst>
+        <pc:spChg chg="mod">
+          <ac:chgData name="Abouganba, Aisha [JJCUS]" userId="0ca5406f-c75f-4f28-998c-faee16679346" providerId="ADAL" clId="{3CC03F55-128A-4B67-AD7C-5FFDDFC0538E}" dt="2026-07-08T15:25:00.672" v="0" actId="26606"/>
+          <ac:spMkLst>
+            <pc:docMk/>
+            <pc:sldMk cId="0" sldId="260"/>
+            <ac:spMk id="5" creationId="{00000000-0000-0000-0000-000000000000}"/>
+          </ac:spMkLst>
+        </pc:spChg>
+      </pc:sldChg>
+      <pc:sldChg chg="modSp mod">
+        <pc:chgData name="Abouganba, Aisha [JJCUS]" userId="0ca5406f-c75f-4f28-998c-faee16679346" providerId="ADAL" clId="{3CC03F55-128A-4B67-AD7C-5FFDDFC0538E}" dt="2026-07-08T15:25:00.672" v="0" actId="26606"/>
+        <pc:sldMkLst>
+          <pc:docMk/>
+          <pc:sldMk cId="0" sldId="261"/>
+        </pc:sldMkLst>
+        <pc:spChg chg="mod">
+          <ac:chgData name="Abouganba, Aisha [JJCUS]" userId="0ca5406f-c75f-4f28-998c-faee16679346" providerId="ADAL" clId="{3CC03F55-128A-4B67-AD7C-5FFDDFC0538E}" dt="2026-07-08T15:25:00.672" v="0" actId="26606"/>
+          <ac:spMkLst>
+            <pc:docMk/>
+            <pc:sldMk cId="0" sldId="261"/>
+            <ac:spMk id="5" creationId="{00000000-0000-0000-0000-000000000000}"/>
+          </ac:spMkLst>
+        </pc:spChg>
+      </pc:sldChg>
+      <pc:sldChg chg="modSp mod">
+        <pc:chgData name="Abouganba, Aisha [JJCUS]" userId="0ca5406f-c75f-4f28-998c-faee16679346" providerId="ADAL" clId="{3CC03F55-128A-4B67-AD7C-5FFDDFC0538E}" dt="2026-07-08T15:25:00.672" v="0" actId="26606"/>
+        <pc:sldMkLst>
+          <pc:docMk/>
+          <pc:sldMk cId="0" sldId="262"/>
+        </pc:sldMkLst>
+        <pc:spChg chg="mod">
+          <ac:chgData name="Abouganba, Aisha [JJCUS]" userId="0ca5406f-c75f-4f28-998c-faee16679346" providerId="ADAL" clId="{3CC03F55-128A-4B67-AD7C-5FFDDFC0538E}" dt="2026-07-08T15:25:00.672" v="0" actId="26606"/>
+          <ac:spMkLst>
+            <pc:docMk/>
+            <pc:sldMk cId="0" sldId="262"/>
+            <ac:spMk id="4" creationId="{00000000-0000-0000-0000-000000000000}"/>
+          </ac:spMkLst>
+        </pc:spChg>
+      </pc:sldChg>
+    </pc:docChg>
+  </pc:docChgLst>
+</pc:chgInfo>
 </file>
 
 <file path=ppt/charts/chart1.xml><?xml version="1.0" encoding="utf-8"?>
@@ -2481,7 +2590,18 @@
                 <a:ea typeface="Calibri" pitchFamily="34" charset="-122"/>
                 <a:cs typeface="Calibri" pitchFamily="34" charset="-120"/>
               </a:rPr>
-              <a:t>EXECUTIVE SUMMARY</a:t>
+              <a:t>SUMMARY</a:t>
+            </a:r>
+            <a:r>
+              <a:rPr lang="en-US" sz="1050" b="1" kern="0" spc="300">
+                <a:solidFill>
+                  <a:srgbClr val="C9D6E8"/>
+                </a:solidFill>
+                <a:latin typeface="Calibri" pitchFamily="34" charset="0"/>
+                <a:ea typeface="Calibri" pitchFamily="34" charset="-122"/>
+                <a:cs typeface="Calibri" pitchFamily="34" charset="-120"/>
+              </a:rPr>
+              <a:t> OF KEY ISSUES</a:t>
             </a:r>
             <a:endParaRPr lang="en-US" sz="1050" dirty="0"/>
           </a:p>
@@ -3520,7 +3640,7 @@
               <a:buNone/>
             </a:pPr>
             <a:r>
-              <a:rPr lang="en-US" sz="1050" b="1" kern="0" spc="300" dirty="0">
+              <a:rPr lang="en-US" sz="1050" b="1" kern="0" spc="300">
                 <a:solidFill>
                   <a:srgbClr val="C9D6E8"/>
                 </a:solidFill>
@@ -3528,7 +3648,7 @@
                 <a:ea typeface="Calibri" pitchFamily="34" charset="-122"/>
                 <a:cs typeface="Calibri" pitchFamily="34" charset="-120"/>
               </a:rPr>
-              <a:t>COMPONENT DEEP DIVE</a:t>
+              <a:t>EXCEL DATA ANALYSIS FINDINGS</a:t>
             </a:r>
             <a:endParaRPr lang="en-US" sz="1050" dirty="0"/>
           </a:p>
@@ -4442,7 +4562,7 @@
               <a:buNone/>
             </a:pPr>
             <a:r>
-              <a:rPr lang="en-US" sz="1050" b="1" kern="0" spc="300" dirty="0">
+              <a:rPr lang="en-US" sz="1050" b="1" kern="0" spc="300">
                 <a:solidFill>
                   <a:srgbClr val="C9D6E8"/>
                 </a:solidFill>
@@ -4450,7 +4570,7 @@
                 <a:ea typeface="Calibri" pitchFamily="34" charset="-122"/>
                 <a:cs typeface="Calibri" pitchFamily="34" charset="-120"/>
               </a:rPr>
-              <a:t>SUPPLIER PERFORMANCE</a:t>
+              <a:t>EXCEL DATA ANALYSIS FINDINGS</a:t>
             </a:r>
             <a:endParaRPr lang="en-US" sz="1050" dirty="0"/>
           </a:p>
@@ -8649,7 +8769,7 @@
               <a:buNone/>
             </a:pPr>
             <a:r>
-              <a:rPr lang="en-US" sz="1050" b="1" kern="0" spc="300" dirty="0">
+              <a:rPr lang="en-US" sz="1050" b="1" kern="0" spc="300">
                 <a:solidFill>
                   <a:srgbClr val="C9D6E8"/>
                 </a:solidFill>
@@ -8657,7 +8777,7 @@
                 <a:ea typeface="Calibri" pitchFamily="34" charset="-122"/>
                 <a:cs typeface="Calibri" pitchFamily="34" charset="-120"/>
               </a:rPr>
-              <a:t>COMPLIANCE EXPOSURE</a:t>
+              <a:t>EXCEL DATA ANALYSIS FINDINGS</a:t>
             </a:r>
             <a:endParaRPr lang="en-US" sz="1050" dirty="0"/>
           </a:p>
@@ -9790,7 +9910,7 @@
               <a:buNone/>
             </a:pPr>
             <a:r>
-              <a:rPr lang="en-US" sz="1050" b="1" kern="0" spc="300" dirty="0">
+              <a:rPr lang="en-US" sz="1050" b="1" kern="0" spc="300">
                 <a:solidFill>
                   <a:srgbClr val="C9D6E8"/>
                 </a:solidFill>
@@ -9798,7 +9918,7 @@
                 <a:ea typeface="Calibri" pitchFamily="34" charset="-122"/>
                 <a:cs typeface="Calibri" pitchFamily="34" charset="-120"/>
               </a:rPr>
-              <a:t>MITIGATION</a:t>
+              <a:t>PROPOSED SOLUTIONS</a:t>
             </a:r>
             <a:endParaRPr lang="en-US" sz="1050" dirty="0"/>
           </a:p>
@@ -11086,7 +11206,7 @@
               <a:buNone/>
             </a:pPr>
             <a:r>
-              <a:rPr lang="en-US" sz="1300" b="1" kern="0" spc="400" dirty="0">
+              <a:rPr lang="en-US" sz="1300" b="1" kern="0" spc="400">
                 <a:solidFill>
                   <a:srgbClr val="C9D6E8"/>
                 </a:solidFill>
@@ -11094,7 +11214,7 @@
                 <a:ea typeface="Calibri" pitchFamily="34" charset="-122"/>
                 <a:cs typeface="Calibri" pitchFamily="34" charset="-120"/>
               </a:rPr>
-              <a:t>RECOMMENDED NEXT STEPS</a:t>
+              <a:t>IMPLEMENTATION PLAN</a:t>
             </a:r>
             <a:endParaRPr lang="en-US" sz="1300" dirty="0"/>
           </a:p>
